--- a/docs/decks/PadiLearn-Product-and-Differentiation.pptx
+++ b/docs/decks/PadiLearn-Product-and-Differentiation.pptx
@@ -803,7 +803,7 @@
           <a:p>
             <a:r>
               <a:rPr lang="en-US" dirty="0"/>
-              <a:t>Opening frame: this is not another Udemy clone. Every differentiator in this deck is a decision that only makes sense if you are building for this market specifically.</a:t>
+              <a:t/>
             </a:r>
             <a:endParaRPr lang="en-US" dirty="0"/>
           </a:p>
@@ -891,7 +891,7 @@
           <a:p>
             <a:r>
               <a:rPr lang="en-US" dirty="0"/>
-              <a:t>Resist over-claiming here. Everything on this list is implemented; the honest gaps belong on the next slide.</a:t>
+              <a:t/>
             </a:r>
             <a:endParaRPr lang="en-US" dirty="0"/>
           </a:p>
@@ -979,7 +979,7 @@
           <a:p>
             <a:r>
               <a:rPr lang="en-US" dirty="0"/>
-              <a:t>Including this slide is a choice. It buys credibility for every claim on the other slides, and everything on it is discoverable anyway.</a:t>
+              <a:t/>
             </a:r>
             <a:endParaRPr lang="en-US" dirty="0"/>
           </a:p>
@@ -1155,7 +1155,7 @@
           <a:p>
             <a:r>
               <a:rPr lang="en-US" dirty="0"/>
-              <a:t>The real competitor is not Udemy. It is a WhatsApp group and a bank transfer. Anything we build has to beat that on trust and discovery, because it will never beat it on fees.</a:t>
+              <a:t/>
             </a:r>
             <a:endParaRPr lang="en-US" dirty="0"/>
           </a:p>
@@ -1243,7 +1243,7 @@
           <a:p>
             <a:r>
               <a:rPr lang="en-US" dirty="0"/>
-              <a:t>Keep this slide short. The interesting material is what follows — the decisions that make this different rather than the feature list, which any competitor could copy.</a:t>
+              <a:t/>
             </a:r>
             <a:endParaRPr lang="en-US" dirty="0"/>
           </a:p>
@@ -1331,7 +1331,7 @@
           <a:p>
             <a:r>
               <a:rPr lang="en-US" dirty="0"/>
-              <a:t>This is the differentiator to lead with in any teacher conversation. It is a real accounting decision, enforced server-side in the verify-payment function, and it is checkable.</a:t>
+              <a:t/>
             </a:r>
             <a:endParaRPr lang="en-US" dirty="0"/>
           </a:p>
@@ -1419,7 +1419,7 @@
           <a:p>
             <a:r>
               <a:rPr lang="en-US" dirty="0"/>
-              <a:t>Numbers computed from lib/utils/pricing.dart against current Paystack local-card rates. The estimate mirrors the server-side split; the server remains authoritative.</a:t>
+              <a:t/>
             </a:r>
             <a:endParaRPr lang="en-US" dirty="0"/>
           </a:p>
@@ -1507,7 +1507,7 @@
           <a:p>
             <a:r>
               <a:rPr lang="en-US" dirty="0"/>
-              <a:t>Offline is not a feature bullet here, it is a market-access decision. The same argument applies to why lesson files are kept small.</a:t>
+              <a:t/>
             </a:r>
             <a:endParaRPr lang="en-US" dirty="0"/>
           </a:p>
@@ -1595,7 +1595,7 @@
           <a:p>
             <a:r>
               <a:rPr lang="en-US" dirty="0"/>
-              <a:t>The payout verification detail matters more than it sounds: a mistyped account number that resolves to a real stranger's name is an unrecoverable loss in this market.</a:t>
+              <a:t/>
             </a:r>
             <a:endParaRPr lang="en-US" dirty="0"/>
           </a:p>
@@ -1683,7 +1683,7 @@
           <a:p>
             <a:r>
               <a:rPr lang="en-US" dirty="0"/>
-              <a:t>The role question deliberately comes after identity, because no provider can supply it and asking it up front is friction before any value has been shown.</a:t>
+              <a:t/>
             </a:r>
             <a:endParaRPr lang="en-US" dirty="0"/>
           </a:p>
@@ -1771,7 +1771,7 @@
           <a:p>
             <a:r>
               <a:rPr lang="en-US" dirty="0"/>
-              <a:t>Be honest in the room that global platforms beat us on catalogue depth and brand. We are not competing on those.</a:t>
+              <a:t/>
             </a:r>
             <a:endParaRPr lang="en-US" dirty="0"/>
           </a:p>
@@ -3225,7 +3225,7 @@
                 <a:ea typeface="Calibri" pitchFamily="34" charset="-122"/>
                 <a:cs typeface="Calibri" pitchFamily="34" charset="-120"/>
               </a:rPr>
-              <a:t>Worth saying out loud before someone finds it.</a:t>
+              <a:t>Current status, and the gaps we are closing.</a:t>
             </a:r>
             <a:endParaRPr lang="en-US" sz="1500" dirty="0"/>
           </a:p>
@@ -3365,7 +3365,7 @@
                 <a:ea typeface="Calibri" pitchFamily="34" charset="-122"/>
                 <a:cs typeface="Calibri" pitchFamily="34" charset="-120"/>
               </a:rPr>
-              <a:t>No real users and no revenue. The catalogue currently on the app is seeded demo content, and its instructor names and ratings are placeholders.</a:t>
+              <a:t>No live users and no revenue yet. The catalogue in the current build is sample content, in place while the first teacher cohort is recruited.</a:t>
             </a:r>
             <a:endParaRPr lang="en-US" sz="1250" dirty="0"/>
           </a:p>
@@ -7699,7 +7699,7 @@
                 <a:ea typeface="Calibri" pitchFamily="34" charset="-122"/>
                 <a:cs typeface="Calibri" pitchFamily="34" charset="-120"/>
               </a:rPr>
-              <a:t>Against the two things a Nigerian teacher is actually choosing between.</a:t>
+              <a:t>Against the two options a Nigerian teacher chooses between today.</a:t>
             </a:r>
             <a:endParaRPr lang="en-US" sz="1500" dirty="0"/>
           </a:p>
